--- a/pipline diagram.pptx
+++ b/pipline diagram.pptx
@@ -118,7 +118,7 @@
 <file path=ppt/revisionInfo.xml><?xml version="1.0" encoding="utf-8"?>
 <p1510:revInfo xmlns:a="http://schemas.openxmlformats.org/drawingml/2006/main" xmlns:r="http://schemas.openxmlformats.org/officeDocument/2006/relationships" xmlns:p1510="http://schemas.microsoft.com/office/powerpoint/2015/10/main">
   <p1510:revLst>
-    <p1510:client id="{2323AC23-2DC0-4350-BE85-A0313CC23AE3}" v="17" dt="2026-05-31T22:22:31.406"/>
+    <p1510:client id="{2323AC23-2DC0-4350-BE85-A0313CC23AE3}" v="18" dt="2026-05-31T22:24:08.248"/>
   </p1510:revLst>
 </p1510:revInfo>
 </file>
@@ -128,7 +128,7 @@
   <pc:docChgLst>
     <pc:chgData name="Laura Lujan" userId="da8756df24445728" providerId="LiveId" clId="{A86C11ED-B9B4-4AE9-9A57-E5E63AAEA8AA}"/>
     <pc:docChg chg="custSel addSld modSld">
-      <pc:chgData name="Laura Lujan" userId="da8756df24445728" providerId="LiveId" clId="{A86C11ED-B9B4-4AE9-9A57-E5E63AAEA8AA}" dt="2026-05-31T22:23:21.051" v="778" actId="20577"/>
+      <pc:chgData name="Laura Lujan" userId="da8756df24445728" providerId="LiveId" clId="{A86C11ED-B9B4-4AE9-9A57-E5E63AAEA8AA}" dt="2026-05-31T22:24:49.714" v="814" actId="20577"/>
       <pc:docMkLst>
         <pc:docMk/>
       </pc:docMkLst>
@@ -187,7 +187,7 @@
         </pc:picChg>
       </pc:sldChg>
       <pc:sldChg chg="addSp delSp modSp new mod">
-        <pc:chgData name="Laura Lujan" userId="da8756df24445728" providerId="LiveId" clId="{A86C11ED-B9B4-4AE9-9A57-E5E63AAEA8AA}" dt="2026-05-31T22:23:21.051" v="778" actId="20577"/>
+        <pc:chgData name="Laura Lujan" userId="da8756df24445728" providerId="LiveId" clId="{A86C11ED-B9B4-4AE9-9A57-E5E63AAEA8AA}" dt="2026-05-31T22:24:49.714" v="814" actId="20577"/>
         <pc:sldMkLst>
           <pc:docMk/>
           <pc:sldMk cId="598407546" sldId="259"/>
@@ -209,11 +209,19 @@
           </ac:graphicFrameMkLst>
         </pc:graphicFrameChg>
         <pc:graphicFrameChg chg="add mod modGraphic">
-          <ac:chgData name="Laura Lujan" userId="da8756df24445728" providerId="LiveId" clId="{A86C11ED-B9B4-4AE9-9A57-E5E63AAEA8AA}" dt="2026-05-31T22:23:21.051" v="778" actId="20577"/>
+          <ac:chgData name="Laura Lujan" userId="da8756df24445728" providerId="LiveId" clId="{A86C11ED-B9B4-4AE9-9A57-E5E63AAEA8AA}" dt="2026-05-31T22:24:19.899" v="782" actId="1076"/>
           <ac:graphicFrameMkLst>
             <pc:docMk/>
             <pc:sldMk cId="598407546" sldId="259"/>
             <ac:graphicFrameMk id="7" creationId="{EE8D9C1A-159C-028C-29AD-8659F7BD9767}"/>
+          </ac:graphicFrameMkLst>
+        </pc:graphicFrameChg>
+        <pc:graphicFrameChg chg="add mod modGraphic">
+          <ac:chgData name="Laura Lujan" userId="da8756df24445728" providerId="LiveId" clId="{A86C11ED-B9B4-4AE9-9A57-E5E63AAEA8AA}" dt="2026-05-31T22:24:49.714" v="814" actId="20577"/>
+          <ac:graphicFrameMkLst>
+            <pc:docMk/>
+            <pc:sldMk cId="598407546" sldId="259"/>
+            <ac:graphicFrameMk id="8" creationId="{C8E26D18-AEB3-3589-DF87-BF9F4648F902}"/>
           </ac:graphicFrameMkLst>
         </pc:graphicFrameChg>
       </pc:sldChg>
@@ -8015,13 +8023,13 @@
           <p:nvPr>
             <p:extLst>
               <p:ext uri="{D42A27DB-BD31-4B8C-83A1-F6EECF244321}">
-                <p14:modId xmlns:p14="http://schemas.microsoft.com/office/powerpoint/2010/main" val="1406558438"/>
+                <p14:modId xmlns:p14="http://schemas.microsoft.com/office/powerpoint/2010/main" val="4289707775"/>
               </p:ext>
             </p:extLst>
           </p:nvPr>
         </p:nvGraphicFramePr>
         <p:xfrm>
-          <a:off x="838200" y="3549016"/>
+          <a:off x="838199" y="3308985"/>
           <a:ext cx="10515597" cy="1010920"/>
         </p:xfrm>
         <a:graphic>
@@ -8142,6 +8150,160 @@
                 <a:extLst>
                   <a:ext uri="{0D108BD9-81ED-4DB2-BD59-A6C34878D82A}">
                     <a16:rowId xmlns:a16="http://schemas.microsoft.com/office/drawing/2014/main" val="3607065820"/>
+                  </a:ext>
+                </a:extLst>
+              </a:tr>
+            </a:tbl>
+          </a:graphicData>
+        </a:graphic>
+      </p:graphicFrame>
+      <p:graphicFrame>
+        <p:nvGraphicFramePr>
+          <p:cNvPr id="8" name="Table 7">
+            <a:extLst>
+              <a:ext uri="{FF2B5EF4-FFF2-40B4-BE49-F238E27FC236}">
+                <a16:creationId xmlns:a16="http://schemas.microsoft.com/office/drawing/2014/main" id="{C8E26D18-AEB3-3589-DF87-BF9F4648F902}"/>
+              </a:ext>
+            </a:extLst>
+          </p:cNvPr>
+          <p:cNvGraphicFramePr>
+            <a:graphicFrameLocks noGrp="1"/>
+          </p:cNvGraphicFramePr>
+          <p:nvPr>
+            <p:extLst>
+              <p:ext uri="{D42A27DB-BD31-4B8C-83A1-F6EECF244321}">
+                <p14:modId xmlns:p14="http://schemas.microsoft.com/office/powerpoint/2010/main" val="2052632665"/>
+              </p:ext>
+            </p:extLst>
+          </p:nvPr>
+        </p:nvGraphicFramePr>
+        <p:xfrm>
+          <a:off x="838199" y="4319905"/>
+          <a:ext cx="10515597" cy="736600"/>
+        </p:xfrm>
+        <a:graphic>
+          <a:graphicData uri="http://schemas.openxmlformats.org/drawingml/2006/table">
+            <a:tbl>
+              <a:tblPr firstRow="1" bandRow="1">
+                <a:tableStyleId>{5C22544A-7EE6-4342-B048-85BDC9FD1C3A}</a:tableStyleId>
+              </a:tblPr>
+              <a:tblGrid>
+                <a:gridCol w="3505199">
+                  <a:extLst>
+                    <a:ext uri="{9D8B030D-6E8A-4147-A177-3AD203B41FA5}">
+                      <a16:colId xmlns:a16="http://schemas.microsoft.com/office/drawing/2014/main" val="2161526982"/>
+                    </a:ext>
+                  </a:extLst>
+                </a:gridCol>
+                <a:gridCol w="3505199">
+                  <a:extLst>
+                    <a:ext uri="{9D8B030D-6E8A-4147-A177-3AD203B41FA5}">
+                      <a16:colId xmlns:a16="http://schemas.microsoft.com/office/drawing/2014/main" val="4125278154"/>
+                    </a:ext>
+                  </a:extLst>
+                </a:gridCol>
+                <a:gridCol w="3505199">
+                  <a:extLst>
+                    <a:ext uri="{9D8B030D-6E8A-4147-A177-3AD203B41FA5}">
+                      <a16:colId xmlns:a16="http://schemas.microsoft.com/office/drawing/2014/main" val="155680219"/>
+                    </a:ext>
+                  </a:extLst>
+                </a:gridCol>
+              </a:tblGrid>
+              <a:tr h="0">
+                <a:tc>
+                  <a:txBody>
+                    <a:bodyPr/>
+                    <a:lstStyle/>
+                    <a:p>
+                      <a:r>
+                        <a:rPr lang="en-IE" dirty="0"/>
+                        <a:t>Events Data set</a:t>
+                      </a:r>
+                    </a:p>
+                  </a:txBody>
+                  <a:tcPr/>
+                </a:tc>
+                <a:tc>
+                  <a:txBody>
+                    <a:bodyPr/>
+                    <a:lstStyle/>
+                    <a:p>
+                      <a:r>
+                        <a:rPr lang="en-IE" dirty="0"/>
+                        <a:t>Analysis</a:t>
+                      </a:r>
+                    </a:p>
+                  </a:txBody>
+                  <a:tcPr/>
+                </a:tc>
+                <a:tc>
+                  <a:txBody>
+                    <a:bodyPr/>
+                    <a:lstStyle/>
+                    <a:p>
+                      <a:r>
+                        <a:rPr lang="en-IE" dirty="0"/>
+                        <a:t>Sample</a:t>
+                      </a:r>
+                    </a:p>
+                  </a:txBody>
+                  <a:tcPr/>
+                </a:tc>
+                <a:extLst>
+                  <a:ext uri="{0D108BD9-81ED-4DB2-BD59-A6C34878D82A}">
+                    <a16:rowId xmlns:a16="http://schemas.microsoft.com/office/drawing/2014/main" val="2030670389"/>
+                  </a:ext>
+                </a:extLst>
+              </a:tr>
+              <a:tr h="370840">
+                <a:tc>
+                  <a:txBody>
+                    <a:bodyPr/>
+                    <a:lstStyle/>
+                    <a:p>
+                      <a:r>
+                        <a:rPr lang="en-IE" dirty="0"/>
+                        <a:t>Events and </a:t>
+                      </a:r>
+                      <a:r>
+                        <a:rPr lang="en-IE"/>
+                        <a:t>impact score</a:t>
+                      </a:r>
+                      <a:endParaRPr lang="en-IE" dirty="0"/>
+                    </a:p>
+                  </a:txBody>
+                  <a:tcPr/>
+                </a:tc>
+                <a:tc>
+                  <a:txBody>
+                    <a:bodyPr/>
+                    <a:lstStyle/>
+                    <a:p>
+                      <a:r>
+                        <a:rPr lang="en-IE" dirty="0"/>
+                        <a:t>Quantitative</a:t>
+                      </a:r>
+                    </a:p>
+                  </a:txBody>
+                  <a:tcPr/>
+                </a:tc>
+                <a:tc>
+                  <a:txBody>
+                    <a:bodyPr/>
+                    <a:lstStyle/>
+                    <a:p>
+                      <a:r>
+                        <a:rPr lang="en-IE" dirty="0"/>
+                        <a:t>1096</a:t>
+                      </a:r>
+                    </a:p>
+                  </a:txBody>
+                  <a:tcPr/>
+                </a:tc>
+                <a:extLst>
+                  <a:ext uri="{0D108BD9-81ED-4DB2-BD59-A6C34878D82A}">
+                    <a16:rowId xmlns:a16="http://schemas.microsoft.com/office/drawing/2014/main" val="688620205"/>
                   </a:ext>
                 </a:extLst>
               </a:tr>
